--- a/doc/제안서.pptx
+++ b/doc/제안서.pptx
@@ -17,9 +17,10 @@
     <p:sldId id="265" r:id="rId11"/>
     <p:sldId id="266" r:id="rId12"/>
     <p:sldId id="267" r:id="rId13"/>
+    <p:sldId id="268" r:id="rId14"/>
   </p:sldIdLst>
   <p:notesMasterIdLst>
-    <p:notesMasterId r:id="rId14"/>
+    <p:notesMasterId r:id="rId15"/>
   </p:notesMasterIdLst>
   <p:sldSz cx="12192000" cy="6858000"/>
   <p:notesSz cx="6858000" cy="12192000"/>
@@ -689,7 +690,7 @@
           <a:p>
             <a:r>
               <a:rPr lang="en-US" dirty="0"/>
-              <a:t>파일럿 IP: IEEE1500 HBM PMBIST + AXI4-Lite. CDC가 핵심 리스크. doc/ip/에 골격 제공.</a:t>
+              <a:t>버전관리: 온프레미스 Bitbucket Data Center. CI는 사내 Jenkins/Bamboo(웹훅) + Code Insights. Pipelines 클라우드 전용 미사용. 사인오프는 사람.</a:t>
             </a:r>
             <a:endParaRPr lang="en-US" dirty="0"/>
           </a:p>
@@ -777,7 +778,7 @@
           <a:p>
             <a:r>
               <a:rPr lang="en-US" dirty="0"/>
-              <a:t>결론 + 다음 단계: doc/ip 골격으로 파일럿 착수.</a:t>
+              <a:t>파일럿 IP: IEEE1500 HBM PMBIST + AXI4-Lite. CDC가 핵심 리스크. doc/ip/에 골격 제공.</a:t>
             </a:r>
             <a:endParaRPr lang="en-US" dirty="0"/>
           </a:p>
@@ -801,6 +802,94 @@
             <a:fld id="{F7021451-1387-4CA6-816F-3879F97B5CBC}" type="slidenum">
               <a:rPr lang="en-US"/>
               <a:t>12</a:t>
+            </a:fld>
+            <a:endParaRPr lang="en-US"/>
+          </a:p>
+        </p:txBody>
+      </p:sp>
+    </p:spTree>
+    <p:extLst>
+      <p:ext uri="{BB962C8B-B14F-4D97-AF65-F5344CB8AC3E}">
+        <p14:creationId xmlns:p14="http://schemas.microsoft.com/office/powerpoint/2010/main" val="1024086991"/>
+      </p:ext>
+    </p:extLst>
+  </p:cSld>
+  <p:clrMapOvr>
+    <a:masterClrMapping/>
+  </p:clrMapOvr>
+</p:notes>
+</file>
+
+<file path=ppt/notesSlides/notesSlide13.xml><?xml version="1.0" encoding="utf-8"?>
+<p:notes xmlns:a="http://schemas.openxmlformats.org/drawingml/2006/main" xmlns:r="http://schemas.openxmlformats.org/officeDocument/2006/relationships" xmlns:p="http://schemas.openxmlformats.org/presentationml/2006/main">
+  <p:cSld>
+    <p:spTree>
+      <p:nvGrpSpPr>
+        <p:cNvPr id="1" name=""/>
+        <p:cNvGrpSpPr/>
+        <p:nvPr/>
+      </p:nvGrpSpPr>
+      <p:grpSpPr>
+        <a:xfrm>
+          <a:off x="0" y="0"/>
+          <a:ext cx="0" cy="0"/>
+          <a:chOff x="0" y="0"/>
+          <a:chExt cx="0" cy="0"/>
+        </a:xfrm>
+      </p:grpSpPr>
+      <p:sp>
+        <p:nvSpPr>
+          <p:cNvPr id="2" name="Slide Image Placeholder 1"/>
+          <p:cNvSpPr>
+            <a:spLocks noGrp="1" noRot="1" noChangeAspect="1"/>
+          </p:cNvSpPr>
+          <p:nvPr>
+            <p:ph type="sldImg"/>
+          </p:nvPr>
+        </p:nvSpPr>
+        <p:spPr/>
+      </p:sp>
+      <p:sp>
+        <p:nvSpPr>
+          <p:cNvPr id="3" name="Notes Placeholder 2"/>
+          <p:cNvSpPr>
+            <a:spLocks noGrp="1"/>
+          </p:cNvSpPr>
+          <p:nvPr>
+            <p:ph type="body" idx="1"/>
+          </p:nvPr>
+        </p:nvSpPr>
+        <p:spPr/>
+        <p:txBody>
+          <a:bodyPr/>
+          <a:lstStyle/>
+          <a:p>
+            <a:r>
+              <a:rPr lang="en-US" dirty="0"/>
+              <a:t>결론 + 다음 단계: doc/ip 골격으로 파일럿 착수.</a:t>
+            </a:r>
+            <a:endParaRPr lang="en-US" dirty="0"/>
+          </a:p>
+        </p:txBody>
+      </p:sp>
+      <p:sp>
+        <p:nvSpPr>
+          <p:cNvPr id="4" name="Slide Number Placeholder 3"/>
+          <p:cNvSpPr>
+            <a:spLocks noGrp="1"/>
+          </p:cNvSpPr>
+          <p:nvPr>
+            <p:ph type="sldNum" sz="quarter" idx="10"/>
+          </p:nvPr>
+        </p:nvSpPr>
+        <p:spPr/>
+        <p:txBody>
+          <a:bodyPr/>
+          <a:lstStyle/>
+          <a:p>
+            <a:fld id="{F7021451-1387-4CA6-816F-3879F97B5CBC}" type="slidenum">
+              <a:rPr lang="en-US"/>
+              <a:t>13</a:t>
             </a:fld>
             <a:endParaRPr lang="en-US"/>
           </a:p>
@@ -3437,7 +3526,7 @@
                 <a:ea typeface="Calibri" pitchFamily="34" charset="-122"/>
                 <a:cs typeface="Calibri" pitchFamily="34" charset="-120"/>
               </a:rPr>
-              <a:t>파일럿 대상 IP</a:t>
+              <a:t>버전 관리 · CI</a:t>
             </a:r>
             <a:endParaRPr lang="en-US" sz="1200" dirty="0"/>
           </a:p>
@@ -3476,7 +3565,7 @@
                 <a:ea typeface="Cambria" pitchFamily="34" charset="-122"/>
                 <a:cs typeface="Cambria" pitchFamily="34" charset="-120"/>
               </a:rPr>
-              <a:t>AXI4-Lite로 제어되는 IEEE 1500 HBM PMBIST 컨트롤러</a:t>
+              <a:t>온프레미스 Bitbucket Data Center — IP는 사내 경계를 벗어나지 않는다</a:t>
             </a:r>
             <a:endParaRPr lang="en-US" sz="3200" dirty="0"/>
           </a:p>
@@ -3490,452 +3579,12 @@
         </p:nvSpPr>
         <p:spPr>
           <a:xfrm>
-            <a:off x="731520" y="1965960"/>
-            <a:ext cx="3108960" cy="1554480"/>
+            <a:off x="548640" y="1783080"/>
+            <a:ext cx="5394960" cy="3703320"/>
           </a:xfrm>
           <a:prstGeom prst="roundRect">
             <a:avLst>
-              <a:gd name="adj" fmla="val 5882"/>
-            </a:avLst>
-          </a:prstGeom>
-          <a:solidFill>
-            <a:srgbClr val="153B66"/>
-          </a:solidFill>
-          <a:ln/>
-        </p:spPr>
-      </p:sp>
-      <p:sp>
-        <p:nvSpPr>
-          <p:cNvPr id="5" name="Text 3"/>
-          <p:cNvSpPr txBox="1"/>
-          <p:nvPr/>
-        </p:nvSpPr>
-        <p:spPr>
-          <a:xfrm>
-            <a:off x="868680" y="2221992"/>
-            <a:ext cx="2834640" cy="640080"/>
-          </a:xfrm>
-          <a:prstGeom prst="rect">
-            <a:avLst/>
-          </a:prstGeom>
-          <a:noFill/>
-          <a:ln/>
-        </p:spPr>
-        <p:txBody>
-          <a:bodyPr wrap="square" lIns="0" tIns="0" rIns="0" bIns="0" rtlCol="0" anchor="ctr"/>
-          <a:lstStyle/>
-          <a:p>
-            <a:pPr algn="ctr" indent="0" marL="0">
-              <a:buNone/>
-            </a:pPr>
-            <a:r>
-              <a:rPr lang="en-US" sz="1800" b="1" dirty="0">
-                <a:solidFill>
-                  <a:srgbClr val="FFFFFF"/>
-                </a:solidFill>
-                <a:latin typeface="Cambria" pitchFamily="34" charset="0"/>
-                <a:ea typeface="Cambria" pitchFamily="34" charset="-122"/>
-                <a:cs typeface="Cambria" pitchFamily="34" charset="-120"/>
-              </a:rPr>
-              <a:t>호스트</a:t>
-            </a:r>
-            <a:endParaRPr lang="en-US" sz="1800" dirty="0"/>
-          </a:p>
-        </p:txBody>
-      </p:sp>
-      <p:sp>
-        <p:nvSpPr>
-          <p:cNvPr id="6" name="Text 4"/>
-          <p:cNvSpPr txBox="1"/>
-          <p:nvPr/>
-        </p:nvSpPr>
-        <p:spPr>
-          <a:xfrm>
-            <a:off x="868680" y="2834640"/>
-            <a:ext cx="2834640" cy="594360"/>
-          </a:xfrm>
-          <a:prstGeom prst="rect">
-            <a:avLst/>
-          </a:prstGeom>
-          <a:noFill/>
-          <a:ln/>
-        </p:spPr>
-        <p:txBody>
-          <a:bodyPr wrap="square" lIns="0" tIns="0" rIns="0" bIns="0" rtlCol="0" anchor="ctr"/>
-          <a:lstStyle/>
-          <a:p>
-            <a:pPr algn="ctr" indent="0" marL="0">
-              <a:buNone/>
-            </a:pPr>
-            <a:r>
-              <a:rPr lang="en-US" sz="1250" dirty="0">
-                <a:solidFill>
-                  <a:srgbClr val="EAF3FA"/>
-                </a:solidFill>
-                <a:latin typeface="Calibri" pitchFamily="34" charset="0"/>
-                <a:ea typeface="Calibri" pitchFamily="34" charset="-122"/>
-                <a:cs typeface="Calibri" pitchFamily="34" charset="-120"/>
-              </a:rPr>
-              <a:t>AXI4-Lite</a:t>
-            </a:r>
-            <a:endParaRPr lang="en-US" sz="1250" dirty="0"/>
-          </a:p>
-          <a:p>
-            <a:pPr algn="ctr" indent="0" marL="0">
-              <a:buNone/>
-            </a:pPr>
-            <a:r>
-              <a:rPr lang="en-US" sz="1250" dirty="0">
-                <a:solidFill>
-                  <a:srgbClr val="EAF3FA"/>
-                </a:solidFill>
-                <a:latin typeface="Calibri" pitchFamily="34" charset="0"/>
-                <a:ea typeface="Calibri" pitchFamily="34" charset="-122"/>
-                <a:cs typeface="Calibri" pitchFamily="34" charset="-120"/>
-              </a:rPr>
-              <a:t>CSR 제어</a:t>
-            </a:r>
-            <a:endParaRPr lang="en-US" sz="1250" dirty="0"/>
-          </a:p>
-        </p:txBody>
-      </p:sp>
-      <p:sp>
-        <p:nvSpPr>
-          <p:cNvPr id="7" name="Text 5"/>
-          <p:cNvSpPr txBox="1"/>
-          <p:nvPr/>
-        </p:nvSpPr>
-        <p:spPr>
-          <a:xfrm>
-            <a:off x="3886200" y="2423160"/>
-            <a:ext cx="731520" cy="640080"/>
-          </a:xfrm>
-          <a:prstGeom prst="rect">
-            <a:avLst/>
-          </a:prstGeom>
-          <a:noFill/>
-          <a:ln/>
-        </p:spPr>
-        <p:txBody>
-          <a:bodyPr wrap="square" lIns="0" tIns="0" rIns="0" bIns="0" rtlCol="0" anchor="ctr"/>
-          <a:lstStyle/>
-          <a:p>
-            <a:pPr algn="ctr" indent="0" marL="0">
-              <a:buNone/>
-            </a:pPr>
-            <a:r>
-              <a:rPr lang="en-US" sz="2800" b="1" dirty="0">
-                <a:solidFill>
-                  <a:srgbClr val="5B6B7A"/>
-                </a:solidFill>
-              </a:rPr>
-              <a:t>→</a:t>
-            </a:r>
-            <a:endParaRPr lang="en-US" sz="2800" dirty="0"/>
-          </a:p>
-        </p:txBody>
-      </p:sp>
-      <p:sp>
-        <p:nvSpPr>
-          <p:cNvPr id="8" name="Shape 6"/>
-          <p:cNvSpPr/>
-          <p:nvPr/>
-        </p:nvSpPr>
-        <p:spPr>
-          <a:xfrm>
-            <a:off x="4663440" y="1965960"/>
-            <a:ext cx="3108960" cy="1554480"/>
-          </a:xfrm>
-          <a:prstGeom prst="roundRect">
-            <a:avLst>
-              <a:gd name="adj" fmla="val 5882"/>
-            </a:avLst>
-          </a:prstGeom>
-          <a:solidFill>
-            <a:srgbClr val="1FB6A6"/>
-          </a:solidFill>
-          <a:ln/>
-        </p:spPr>
-      </p:sp>
-      <p:sp>
-        <p:nvSpPr>
-          <p:cNvPr id="9" name="Text 7"/>
-          <p:cNvSpPr txBox="1"/>
-          <p:nvPr/>
-        </p:nvSpPr>
-        <p:spPr>
-          <a:xfrm>
-            <a:off x="4800600" y="2221992"/>
-            <a:ext cx="2834640" cy="640080"/>
-          </a:xfrm>
-          <a:prstGeom prst="rect">
-            <a:avLst/>
-          </a:prstGeom>
-          <a:noFill/>
-          <a:ln/>
-        </p:spPr>
-        <p:txBody>
-          <a:bodyPr wrap="square" lIns="0" tIns="0" rIns="0" bIns="0" rtlCol="0" anchor="ctr"/>
-          <a:lstStyle/>
-          <a:p>
-            <a:pPr algn="ctr" indent="0" marL="0">
-              <a:buNone/>
-            </a:pPr>
-            <a:r>
-              <a:rPr lang="en-US" sz="1800" b="1" dirty="0">
-                <a:solidFill>
-                  <a:srgbClr val="FFFFFF"/>
-                </a:solidFill>
-                <a:latin typeface="Cambria" pitchFamily="34" charset="0"/>
-                <a:ea typeface="Cambria" pitchFamily="34" charset="-122"/>
-                <a:cs typeface="Cambria" pitchFamily="34" charset="-120"/>
-              </a:rPr>
-              <a:t>IEEE 1500</a:t>
-            </a:r>
-            <a:endParaRPr lang="en-US" sz="1800" dirty="0"/>
-          </a:p>
-          <a:p>
-            <a:pPr algn="ctr" indent="0" marL="0">
-              <a:buNone/>
-            </a:pPr>
-            <a:r>
-              <a:rPr lang="en-US" sz="1800" b="1" dirty="0">
-                <a:solidFill>
-                  <a:srgbClr val="FFFFFF"/>
-                </a:solidFill>
-                <a:latin typeface="Cambria" pitchFamily="34" charset="0"/>
-                <a:ea typeface="Cambria" pitchFamily="34" charset="-122"/>
-                <a:cs typeface="Cambria" pitchFamily="34" charset="-120"/>
-              </a:rPr>
-              <a:t>컨트롤러</a:t>
-            </a:r>
-            <a:endParaRPr lang="en-US" sz="1800" dirty="0"/>
-          </a:p>
-        </p:txBody>
-      </p:sp>
-      <p:sp>
-        <p:nvSpPr>
-          <p:cNvPr id="10" name="Text 8"/>
-          <p:cNvSpPr txBox="1"/>
-          <p:nvPr/>
-        </p:nvSpPr>
-        <p:spPr>
-          <a:xfrm>
-            <a:off x="4800600" y="2834640"/>
-            <a:ext cx="2834640" cy="594360"/>
-          </a:xfrm>
-          <a:prstGeom prst="rect">
-            <a:avLst/>
-          </a:prstGeom>
-          <a:noFill/>
-          <a:ln/>
-        </p:spPr>
-        <p:txBody>
-          <a:bodyPr wrap="square" lIns="0" tIns="0" rIns="0" bIns="0" rtlCol="0" anchor="ctr"/>
-          <a:lstStyle/>
-          <a:p>
-            <a:pPr algn="ctr" indent="0" marL="0">
-              <a:buNone/>
-            </a:pPr>
-            <a:r>
-              <a:rPr lang="en-US" sz="1250" dirty="0">
-                <a:solidFill>
-                  <a:srgbClr val="EAF3FA"/>
-                </a:solidFill>
-                <a:latin typeface="Calibri" pitchFamily="34" charset="0"/>
-                <a:ea typeface="Calibri" pitchFamily="34" charset="-122"/>
-                <a:cs typeface="Calibri" pitchFamily="34" charset="-120"/>
-              </a:rPr>
-              <a:t>WSC · WSI/WSO</a:t>
-            </a:r>
-            <a:endParaRPr lang="en-US" sz="1250" dirty="0"/>
-          </a:p>
-          <a:p>
-            <a:pPr algn="ctr" indent="0" marL="0">
-              <a:buNone/>
-            </a:pPr>
-            <a:r>
-              <a:rPr lang="en-US" sz="1250" dirty="0">
-                <a:solidFill>
-                  <a:srgbClr val="EAF3FA"/>
-                </a:solidFill>
-                <a:latin typeface="Calibri" pitchFamily="34" charset="0"/>
-                <a:ea typeface="Calibri" pitchFamily="34" charset="-122"/>
-                <a:cs typeface="Calibri" pitchFamily="34" charset="-120"/>
-              </a:rPr>
-              <a:t>시퀀스 FSM</a:t>
-            </a:r>
-            <a:endParaRPr lang="en-US" sz="1250" dirty="0"/>
-          </a:p>
-        </p:txBody>
-      </p:sp>
-      <p:sp>
-        <p:nvSpPr>
-          <p:cNvPr id="11" name="Text 9"/>
-          <p:cNvSpPr txBox="1"/>
-          <p:nvPr/>
-        </p:nvSpPr>
-        <p:spPr>
-          <a:xfrm>
-            <a:off x="7818120" y="2423160"/>
-            <a:ext cx="731520" cy="640080"/>
-          </a:xfrm>
-          <a:prstGeom prst="rect">
-            <a:avLst/>
-          </a:prstGeom>
-          <a:noFill/>
-          <a:ln/>
-        </p:spPr>
-        <p:txBody>
-          <a:bodyPr wrap="square" lIns="0" tIns="0" rIns="0" bIns="0" rtlCol="0" anchor="ctr"/>
-          <a:lstStyle/>
-          <a:p>
-            <a:pPr algn="ctr" indent="0" marL="0">
-              <a:buNone/>
-            </a:pPr>
-            <a:r>
-              <a:rPr lang="en-US" sz="2800" b="1" dirty="0">
-                <a:solidFill>
-                  <a:srgbClr val="5B6B7A"/>
-                </a:solidFill>
-              </a:rPr>
-              <a:t>→</a:t>
-            </a:r>
-            <a:endParaRPr lang="en-US" sz="2800" dirty="0"/>
-          </a:p>
-        </p:txBody>
-      </p:sp>
-      <p:sp>
-        <p:nvSpPr>
-          <p:cNvPr id="12" name="Shape 10"/>
-          <p:cNvSpPr/>
-          <p:nvPr/>
-        </p:nvSpPr>
-        <p:spPr>
-          <a:xfrm>
-            <a:off x="8595360" y="1965960"/>
-            <a:ext cx="3108960" cy="1554480"/>
-          </a:xfrm>
-          <a:prstGeom prst="roundRect">
-            <a:avLst>
-              <a:gd name="adj" fmla="val 5882"/>
-            </a:avLst>
-          </a:prstGeom>
-          <a:solidFill>
-            <a:srgbClr val="F2A900"/>
-          </a:solidFill>
-          <a:ln/>
-        </p:spPr>
-      </p:sp>
-      <p:sp>
-        <p:nvSpPr>
-          <p:cNvPr id="13" name="Text 11"/>
-          <p:cNvSpPr txBox="1"/>
-          <p:nvPr/>
-        </p:nvSpPr>
-        <p:spPr>
-          <a:xfrm>
-            <a:off x="8732520" y="2221992"/>
-            <a:ext cx="2834640" cy="640080"/>
-          </a:xfrm>
-          <a:prstGeom prst="rect">
-            <a:avLst/>
-          </a:prstGeom>
-          <a:noFill/>
-          <a:ln/>
-        </p:spPr>
-        <p:txBody>
-          <a:bodyPr wrap="square" lIns="0" tIns="0" rIns="0" bIns="0" rtlCol="0" anchor="ctr"/>
-          <a:lstStyle/>
-          <a:p>
-            <a:pPr algn="ctr" indent="0" marL="0">
-              <a:buNone/>
-            </a:pPr>
-            <a:r>
-              <a:rPr lang="en-US" sz="1800" b="1" dirty="0">
-                <a:solidFill>
-                  <a:srgbClr val="FFFFFF"/>
-                </a:solidFill>
-                <a:latin typeface="Cambria" pitchFamily="34" charset="0"/>
-                <a:ea typeface="Cambria" pitchFamily="34" charset="-122"/>
-                <a:cs typeface="Cambria" pitchFamily="34" charset="-120"/>
-              </a:rPr>
-              <a:t>HBM PMBIST</a:t>
-            </a:r>
-            <a:endParaRPr lang="en-US" sz="1800" dirty="0"/>
-          </a:p>
-        </p:txBody>
-      </p:sp>
-      <p:sp>
-        <p:nvSpPr>
-          <p:cNvPr id="14" name="Text 12"/>
-          <p:cNvSpPr txBox="1"/>
-          <p:nvPr/>
-        </p:nvSpPr>
-        <p:spPr>
-          <a:xfrm>
-            <a:off x="8732520" y="2834640"/>
-            <a:ext cx="2834640" cy="594360"/>
-          </a:xfrm>
-          <a:prstGeom prst="rect">
-            <a:avLst/>
-          </a:prstGeom>
-          <a:noFill/>
-          <a:ln/>
-        </p:spPr>
-        <p:txBody>
-          <a:bodyPr wrap="square" lIns="0" tIns="0" rIns="0" bIns="0" rtlCol="0" anchor="ctr"/>
-          <a:lstStyle/>
-          <a:p>
-            <a:pPr algn="ctr" indent="0" marL="0">
-              <a:buNone/>
-            </a:pPr>
-            <a:r>
-              <a:rPr lang="en-US" sz="1250" dirty="0">
-                <a:solidFill>
-                  <a:srgbClr val="EAF3FA"/>
-                </a:solidFill>
-                <a:latin typeface="Calibri" pitchFamily="34" charset="0"/>
-                <a:ea typeface="Calibri" pitchFamily="34" charset="-122"/>
-                <a:cs typeface="Calibri" pitchFamily="34" charset="-120"/>
-              </a:rPr>
-              <a:t>채널별 BIST</a:t>
-            </a:r>
-            <a:endParaRPr lang="en-US" sz="1250" dirty="0"/>
-          </a:p>
-          <a:p>
-            <a:pPr algn="ctr" indent="0" marL="0">
-              <a:buNone/>
-            </a:pPr>
-            <a:r>
-              <a:rPr lang="en-US" sz="1250" dirty="0">
-                <a:solidFill>
-                  <a:srgbClr val="EAF3FA"/>
-                </a:solidFill>
-                <a:latin typeface="Calibri" pitchFamily="34" charset="0"/>
-                <a:ea typeface="Calibri" pitchFamily="34" charset="-122"/>
-                <a:cs typeface="Calibri" pitchFamily="34" charset="-120"/>
-              </a:rPr>
-              <a:t>결과 수집</a:t>
-            </a:r>
-            <a:endParaRPr lang="en-US" sz="1250" dirty="0"/>
-          </a:p>
-        </p:txBody>
-      </p:sp>
-      <p:sp>
-        <p:nvSpPr>
-          <p:cNvPr id="15" name="Shape 13"/>
-          <p:cNvSpPr/>
-          <p:nvPr/>
-        </p:nvSpPr>
-        <p:spPr>
-          <a:xfrm>
-            <a:off x="548640" y="3886200"/>
-            <a:ext cx="5349240" cy="2377440"/>
-          </a:xfrm>
-          <a:prstGeom prst="roundRect">
-            <a:avLst>
-              <a:gd name="adj" fmla="val 3077"/>
+              <a:gd name="adj" fmla="val 1975"/>
             </a:avLst>
           </a:prstGeom>
           <a:solidFill>
@@ -3953,14 +3602,14 @@
       </p:sp>
       <p:sp>
         <p:nvSpPr>
-          <p:cNvPr id="16" name="Text 14"/>
-          <p:cNvSpPr txBox="1"/>
-          <p:nvPr/>
-        </p:nvSpPr>
-        <p:spPr>
-          <a:xfrm>
-            <a:off x="822960" y="4069080"/>
-            <a:ext cx="4754880" cy="365760"/>
+          <p:cNvPr id="5" name="Text 3"/>
+          <p:cNvSpPr txBox="1"/>
+          <p:nvPr/>
+        </p:nvSpPr>
+        <p:spPr>
+          <a:xfrm>
+            <a:off x="822960" y="1965960"/>
+            <a:ext cx="4846320" cy="411480"/>
           </a:xfrm>
           <a:prstGeom prst="rect">
             <a:avLst/>
@@ -3976,7 +3625,7 @@
               <a:buNone/>
             </a:pPr>
             <a:r>
-              <a:rPr lang="en-US" sz="1600" b="1" dirty="0">
+              <a:rPr lang="en-US" sz="1700" b="1" dirty="0">
                 <a:solidFill>
                   <a:srgbClr val="0B2447"/>
                 </a:solidFill>
@@ -3984,22 +3633,22 @@
                 <a:ea typeface="Cambria" pitchFamily="34" charset="-122"/>
                 <a:cs typeface="Cambria" pitchFamily="34" charset="-120"/>
               </a:rPr>
-              <a:t>핵심 리스크</a:t>
-            </a:r>
-            <a:endParaRPr lang="en-US" sz="1600" dirty="0"/>
-          </a:p>
-        </p:txBody>
-      </p:sp>
-      <p:sp>
-        <p:nvSpPr>
-          <p:cNvPr id="17" name="Text 15"/>
-          <p:cNvSpPr txBox="1"/>
-          <p:nvPr/>
-        </p:nvSpPr>
-        <p:spPr>
-          <a:xfrm>
-            <a:off x="868680" y="4526280"/>
-            <a:ext cx="4846320" cy="457200"/>
+              <a:t>리포지토리 · PR 게이트</a:t>
+            </a:r>
+            <a:endParaRPr lang="en-US" sz="1700" dirty="0"/>
+          </a:p>
+        </p:txBody>
+      </p:sp>
+      <p:sp>
+        <p:nvSpPr>
+          <p:cNvPr id="6" name="Text 4"/>
+          <p:cNvSpPr txBox="1"/>
+          <p:nvPr/>
+        </p:nvSpPr>
+        <p:spPr>
+          <a:xfrm>
+            <a:off x="868680" y="2468880"/>
+            <a:ext cx="4892040" cy="658368"/>
           </a:xfrm>
           <a:prstGeom prst="rect">
             <a:avLst/>
@@ -4012,6 +3661,9 @@
           <a:lstStyle/>
           <a:p>
             <a:pPr marL="152400" indent="-152400">
+              <a:lnSpc>
+                <a:spcPct val="105000"/>
+              </a:lnSpc>
               <a:buSzPct val="100000"/>
               <a:buChar char="•"/>
             </a:pPr>
@@ -4024,7 +3676,7 @@
                 <a:ea typeface="Calibri" pitchFamily="34" charset="-122"/>
                 <a:cs typeface="Calibri" pitchFamily="34" charset="-120"/>
               </a:rPr>
-              <a:t>aclk(AXI) ↔ WRCK(테스트) 클록 도메인 크로싱</a:t>
+              <a:t>하네스 정의(.claude/·CLAUDE.md) + 설계 자산(rtl·tb·constraints)을 한 리포에서 코드처럼 관리</a:t>
             </a:r>
             <a:endParaRPr lang="en-US" sz="1300" dirty="0"/>
           </a:p>
@@ -4032,14 +3684,14 @@
       </p:sp>
       <p:sp>
         <p:nvSpPr>
-          <p:cNvPr id="18" name="Text 16"/>
-          <p:cNvSpPr txBox="1"/>
-          <p:nvPr/>
-        </p:nvSpPr>
-        <p:spPr>
-          <a:xfrm>
-            <a:off x="868680" y="5029200"/>
-            <a:ext cx="4846320" cy="457200"/>
+          <p:cNvPr id="7" name="Text 5"/>
+          <p:cNvSpPr txBox="1"/>
+          <p:nvPr/>
+        </p:nvSpPr>
+        <p:spPr>
+          <a:xfrm>
+            <a:off x="868680" y="3182112"/>
+            <a:ext cx="4892040" cy="658368"/>
           </a:xfrm>
           <a:prstGeom prst="rect">
             <a:avLst/>
@@ -4052,6 +3704,9 @@
           <a:lstStyle/>
           <a:p>
             <a:pPr marL="152400" indent="-152400">
+              <a:lnSpc>
+                <a:spcPct val="105000"/>
+              </a:lnSpc>
               <a:buSzPct val="100000"/>
               <a:buChar char="•"/>
             </a:pPr>
@@ -4064,7 +3719,7 @@
                 <a:ea typeface="Calibri" pitchFamily="34" charset="-122"/>
                 <a:cs typeface="Calibri" pitchFamily="34" charset="-120"/>
               </a:rPr>
-              <a:t>리셋 도메인 · 시퀀스 FSM 정합성</a:t>
+              <a:t>기능 브랜치 → PR → 리뷰·승인 → 보호 브랜치 병합</a:t>
             </a:r>
             <a:endParaRPr lang="en-US" sz="1300" dirty="0"/>
           </a:p>
@@ -4072,14 +3727,14 @@
       </p:sp>
       <p:sp>
         <p:nvSpPr>
-          <p:cNvPr id="19" name="Text 17"/>
-          <p:cNvSpPr txBox="1"/>
-          <p:nvPr/>
-        </p:nvSpPr>
-        <p:spPr>
-          <a:xfrm>
-            <a:off x="868680" y="5532120"/>
-            <a:ext cx="4846320" cy="457200"/>
+          <p:cNvPr id="8" name="Text 6"/>
+          <p:cNvSpPr txBox="1"/>
+          <p:nvPr/>
+        </p:nvSpPr>
+        <p:spPr>
+          <a:xfrm>
+            <a:off x="868680" y="3895344"/>
+            <a:ext cx="4892040" cy="658368"/>
           </a:xfrm>
           <a:prstGeom prst="rect">
             <a:avLst/>
@@ -4092,6 +3747,9 @@
           <a:lstStyle/>
           <a:p>
             <a:pPr marL="152400" indent="-152400">
+              <a:lnSpc>
+                <a:spcPct val="105000"/>
+              </a:lnSpc>
               <a:buSzPct val="100000"/>
               <a:buChar char="•"/>
             </a:pPr>
@@ -4104,7 +3762,7 @@
                 <a:ea typeface="Calibri" pitchFamily="34" charset="-122"/>
                 <a:cs typeface="Calibri" pitchFamily="34" charset="-120"/>
               </a:rPr>
-              <a:t>AXI4-Lite 프로토콜 준수 · SLVERR 정책</a:t>
+              <a:t>Merge checks: 필수 승인 · 필수 빌드 통과 · 미해결 태스크 0</a:t>
             </a:r>
             <a:endParaRPr lang="en-US" sz="1300" dirty="0"/>
           </a:p>
@@ -4112,22 +3770,65 @@
       </p:sp>
       <p:sp>
         <p:nvSpPr>
-          <p:cNvPr id="20" name="Shape 18"/>
+          <p:cNvPr id="9" name="Text 7"/>
+          <p:cNvSpPr txBox="1"/>
+          <p:nvPr/>
+        </p:nvSpPr>
+        <p:spPr>
+          <a:xfrm>
+            <a:off x="868680" y="4608576"/>
+            <a:ext cx="4892040" cy="658368"/>
+          </a:xfrm>
+          <a:prstGeom prst="rect">
+            <a:avLst/>
+          </a:prstGeom>
+          <a:noFill/>
+          <a:ln/>
+        </p:spPr>
+        <p:txBody>
+          <a:bodyPr wrap="square" lIns="0" tIns="0" rIns="0" bIns="0" rtlCol="0" anchor="ctr"/>
+          <a:lstStyle/>
+          <a:p>
+            <a:pPr marL="152400" indent="-152400">
+              <a:lnSpc>
+                <a:spcPct val="105000"/>
+              </a:lnSpc>
+              <a:buSzPct val="100000"/>
+              <a:buChar char="•"/>
+            </a:pPr>
+            <a:r>
+              <a:rPr lang="en-US" sz="1300" dirty="0">
+                <a:solidFill>
+                  <a:srgbClr val="1B2733"/>
+                </a:solidFill>
+                <a:latin typeface="Calibri" pitchFamily="34" charset="0"/>
+                <a:ea typeface="Calibri" pitchFamily="34" charset="-122"/>
+                <a:cs typeface="Calibri" pitchFamily="34" charset="-120"/>
+              </a:rPr>
+              <a:t>최종 사인오프 = Bitbucket 필수 승인(사람)</a:t>
+            </a:r>
+            <a:endParaRPr lang="en-US" sz="1300" dirty="0"/>
+          </a:p>
+        </p:txBody>
+      </p:sp>
+      <p:sp>
+        <p:nvSpPr>
+          <p:cNvPr id="10" name="Shape 8"/>
           <p:cNvSpPr/>
           <p:nvPr/>
         </p:nvSpPr>
         <p:spPr>
           <a:xfrm>
-            <a:off x="6172200" y="3886200"/>
-            <a:ext cx="5440680" cy="2377440"/>
+            <a:off x="6172200" y="1783080"/>
+            <a:ext cx="5440680" cy="3703320"/>
           </a:xfrm>
           <a:prstGeom prst="roundRect">
             <a:avLst>
-              <a:gd name="adj" fmla="val 3077"/>
+              <a:gd name="adj" fmla="val 1975"/>
             </a:avLst>
           </a:prstGeom>
           <a:solidFill>
-            <a:srgbClr val="F1F5F9"/>
+            <a:srgbClr val="0B2447"/>
           </a:solidFill>
           <a:ln/>
           <a:effectLst>
@@ -4141,14 +3842,14 @@
       </p:sp>
       <p:sp>
         <p:nvSpPr>
-          <p:cNvPr id="21" name="Text 19"/>
-          <p:cNvSpPr txBox="1"/>
-          <p:nvPr/>
-        </p:nvSpPr>
-        <p:spPr>
-          <a:xfrm>
-            <a:off x="6446520" y="4069080"/>
-            <a:ext cx="4937760" cy="365760"/>
+          <p:cNvPr id="11" name="Text 9"/>
+          <p:cNvSpPr txBox="1"/>
+          <p:nvPr/>
+        </p:nvSpPr>
+        <p:spPr>
+          <a:xfrm>
+            <a:off x="6446520" y="1965960"/>
+            <a:ext cx="4937760" cy="411480"/>
           </a:xfrm>
           <a:prstGeom prst="rect">
             <a:avLst/>
@@ -4164,175 +3865,405 @@
               <a:buNone/>
             </a:pPr>
             <a:r>
-              <a:rPr lang="en-US" sz="1600" b="1" dirty="0">
-                <a:solidFill>
-                  <a:srgbClr val="0B2447"/>
+              <a:rPr lang="en-US" sz="1700" b="1" dirty="0">
+                <a:solidFill>
+                  <a:srgbClr val="FFFFFF"/>
                 </a:solidFill>
                 <a:latin typeface="Cambria" pitchFamily="34" charset="0"/>
                 <a:ea typeface="Cambria" pitchFamily="34" charset="-122"/>
                 <a:cs typeface="Cambria" pitchFamily="34" charset="-120"/>
               </a:rPr>
-              <a:t>제공한 하네스 골격 (doc/ip/)</a:t>
-            </a:r>
-            <a:endParaRPr lang="en-US" sz="1600" dirty="0"/>
-          </a:p>
-        </p:txBody>
-      </p:sp>
-      <p:sp>
-        <p:nvSpPr>
-          <p:cNvPr id="22" name="Text 20"/>
-          <p:cNvSpPr txBox="1"/>
-          <p:nvPr/>
-        </p:nvSpPr>
-        <p:spPr>
-          <a:xfrm>
-            <a:off x="6492240" y="4526280"/>
-            <a:ext cx="4937760" cy="411480"/>
-          </a:xfrm>
-          <a:prstGeom prst="rect">
-            <a:avLst/>
-          </a:prstGeom>
-          <a:noFill/>
-          <a:ln/>
-        </p:spPr>
-        <p:txBody>
-          <a:bodyPr wrap="square" lIns="0" tIns="0" rIns="0" bIns="0" rtlCol="0" anchor="ctr"/>
-          <a:lstStyle/>
-          <a:p>
-            <a:pPr marL="152400" indent="-152400">
-              <a:buSzPct val="100000"/>
-              <a:buChar char="•"/>
-            </a:pPr>
-            <a:r>
-              <a:rPr lang="en-US" sz="1250" dirty="0">
-                <a:solidFill>
-                  <a:srgbClr val="1B2733"/>
+              <a:t>CI — 사내 Jenkins / Bamboo</a:t>
+            </a:r>
+            <a:endParaRPr lang="en-US" sz="1700" dirty="0"/>
+          </a:p>
+        </p:txBody>
+      </p:sp>
+      <p:sp>
+        <p:nvSpPr>
+          <p:cNvPr id="12" name="Shape 10"/>
+          <p:cNvSpPr/>
+          <p:nvPr/>
+        </p:nvSpPr>
+        <p:spPr>
+          <a:xfrm>
+            <a:off x="6446520" y="2487168"/>
+            <a:ext cx="1005840" cy="457200"/>
+          </a:xfrm>
+          <a:prstGeom prst="roundRect">
+            <a:avLst>
+              <a:gd name="adj" fmla="val 12000"/>
+            </a:avLst>
+          </a:prstGeom>
+          <a:solidFill>
+            <a:srgbClr val="1FB6A6"/>
+          </a:solidFill>
+          <a:ln/>
+        </p:spPr>
+      </p:sp>
+      <p:sp>
+        <p:nvSpPr>
+          <p:cNvPr id="13" name="Text 11"/>
+          <p:cNvSpPr txBox="1"/>
+          <p:nvPr/>
+        </p:nvSpPr>
+        <p:spPr>
+          <a:xfrm>
+            <a:off x="6446520" y="2487168"/>
+            <a:ext cx="1005840" cy="457200"/>
+          </a:xfrm>
+          <a:prstGeom prst="rect">
+            <a:avLst/>
+          </a:prstGeom>
+          <a:noFill/>
+          <a:ln/>
+        </p:spPr>
+        <p:txBody>
+          <a:bodyPr wrap="square" lIns="0" tIns="0" rIns="0" bIns="0" rtlCol="0" anchor="ctr"/>
+          <a:lstStyle/>
+          <a:p>
+            <a:pPr algn="ctr" indent="0" marL="0">
+              <a:buNone/>
+            </a:pPr>
+            <a:r>
+              <a:rPr lang="en-US" sz="1300" b="1" dirty="0">
+                <a:solidFill>
+                  <a:srgbClr val="FFFFFF"/>
+                </a:solidFill>
+                <a:latin typeface="Cambria" pitchFamily="34" charset="0"/>
+                <a:ea typeface="Cambria" pitchFamily="34" charset="-122"/>
+                <a:cs typeface="Cambria" pitchFamily="34" charset="-120"/>
+              </a:rPr>
+              <a:t>PR</a:t>
+            </a:r>
+            <a:endParaRPr lang="en-US" sz="1300" dirty="0"/>
+          </a:p>
+        </p:txBody>
+      </p:sp>
+      <p:sp>
+        <p:nvSpPr>
+          <p:cNvPr id="14" name="Text 12"/>
+          <p:cNvSpPr txBox="1"/>
+          <p:nvPr/>
+        </p:nvSpPr>
+        <p:spPr>
+          <a:xfrm>
+            <a:off x="7589520" y="2468880"/>
+            <a:ext cx="3886200" cy="548640"/>
+          </a:xfrm>
+          <a:prstGeom prst="rect">
+            <a:avLst/>
+          </a:prstGeom>
+          <a:noFill/>
+          <a:ln/>
+        </p:spPr>
+        <p:txBody>
+          <a:bodyPr wrap="square" lIns="0" tIns="0" rIns="0" bIns="0" rtlCol="0" anchor="ctr"/>
+          <a:lstStyle/>
+          <a:p>
+            <a:pPr indent="0" marL="0">
+              <a:lnSpc>
+                <a:spcPct val="103000"/>
+              </a:lnSpc>
+              <a:buNone/>
+            </a:pPr>
+            <a:r>
+              <a:rPr lang="en-US" sz="1200" dirty="0">
+                <a:solidFill>
+                  <a:srgbClr val="E7F0F8"/>
                 </a:solidFill>
                 <a:latin typeface="Calibri" pitchFamily="34" charset="0"/>
                 <a:ea typeface="Calibri" pitchFamily="34" charset="-122"/>
                 <a:cs typeface="Calibri" pitchFamily="34" charset="-120"/>
               </a:rPr>
-              <a:t>에이전트 8종 + 스킬 5종 + device-refs 라우터</a:t>
-            </a:r>
-            <a:endParaRPr lang="en-US" sz="1250" dirty="0"/>
-          </a:p>
-        </p:txBody>
-      </p:sp>
-      <p:sp>
-        <p:nvSpPr>
-          <p:cNvPr id="23" name="Text 21"/>
-          <p:cNvSpPr txBox="1"/>
-          <p:nvPr/>
-        </p:nvSpPr>
-        <p:spPr>
-          <a:xfrm>
-            <a:off x="6492240" y="4946904"/>
-            <a:ext cx="4937760" cy="411480"/>
-          </a:xfrm>
-          <a:prstGeom prst="rect">
-            <a:avLst/>
-          </a:prstGeom>
-          <a:noFill/>
-          <a:ln/>
-        </p:spPr>
-        <p:txBody>
-          <a:bodyPr wrap="square" lIns="0" tIns="0" rIns="0" bIns="0" rtlCol="0" anchor="ctr"/>
-          <a:lstStyle/>
-          <a:p>
-            <a:pPr marL="152400" indent="-152400">
-              <a:buSzPct val="100000"/>
-              <a:buChar char="•"/>
-            </a:pPr>
-            <a:r>
-              <a:rPr lang="en-US" sz="1250" dirty="0">
-                <a:solidFill>
-                  <a:srgbClr val="1B2733"/>
+              <a:t>run-lint · run-sim (mock) — 공용 에이전트로 빠른 게이트</a:t>
+            </a:r>
+            <a:endParaRPr lang="en-US" sz="1200" dirty="0"/>
+          </a:p>
+        </p:txBody>
+      </p:sp>
+      <p:sp>
+        <p:nvSpPr>
+          <p:cNvPr id="15" name="Shape 13"/>
+          <p:cNvSpPr/>
+          <p:nvPr/>
+        </p:nvSpPr>
+        <p:spPr>
+          <a:xfrm>
+            <a:off x="6446520" y="3328416"/>
+            <a:ext cx="1005840" cy="457200"/>
+          </a:xfrm>
+          <a:prstGeom prst="roundRect">
+            <a:avLst>
+              <a:gd name="adj" fmla="val 12000"/>
+            </a:avLst>
+          </a:prstGeom>
+          <a:solidFill>
+            <a:srgbClr val="F2A900"/>
+          </a:solidFill>
+          <a:ln/>
+        </p:spPr>
+      </p:sp>
+      <p:sp>
+        <p:nvSpPr>
+          <p:cNvPr id="16" name="Text 14"/>
+          <p:cNvSpPr txBox="1"/>
+          <p:nvPr/>
+        </p:nvSpPr>
+        <p:spPr>
+          <a:xfrm>
+            <a:off x="6446520" y="3328416"/>
+            <a:ext cx="1005840" cy="457200"/>
+          </a:xfrm>
+          <a:prstGeom prst="rect">
+            <a:avLst/>
+          </a:prstGeom>
+          <a:noFill/>
+          <a:ln/>
+        </p:spPr>
+        <p:txBody>
+          <a:bodyPr wrap="square" lIns="0" tIns="0" rIns="0" bIns="0" rtlCol="0" anchor="ctr"/>
+          <a:lstStyle/>
+          <a:p>
+            <a:pPr algn="ctr" indent="0" marL="0">
+              <a:buNone/>
+            </a:pPr>
+            <a:r>
+              <a:rPr lang="en-US" sz="1300" b="1" dirty="0">
+                <a:solidFill>
+                  <a:srgbClr val="0B2447"/>
+                </a:solidFill>
+                <a:latin typeface="Cambria" pitchFamily="34" charset="0"/>
+                <a:ea typeface="Cambria" pitchFamily="34" charset="-122"/>
+                <a:cs typeface="Cambria" pitchFamily="34" charset="-120"/>
+              </a:rPr>
+              <a:t>main</a:t>
+            </a:r>
+            <a:endParaRPr lang="en-US" sz="1300" dirty="0"/>
+          </a:p>
+        </p:txBody>
+      </p:sp>
+      <p:sp>
+        <p:nvSpPr>
+          <p:cNvPr id="17" name="Text 15"/>
+          <p:cNvSpPr txBox="1"/>
+          <p:nvPr/>
+        </p:nvSpPr>
+        <p:spPr>
+          <a:xfrm>
+            <a:off x="7589520" y="3310128"/>
+            <a:ext cx="3886200" cy="548640"/>
+          </a:xfrm>
+          <a:prstGeom prst="rect">
+            <a:avLst/>
+          </a:prstGeom>
+          <a:noFill/>
+          <a:ln/>
+        </p:spPr>
+        <p:txBody>
+          <a:bodyPr wrap="square" lIns="0" tIns="0" rIns="0" bIns="0" rtlCol="0" anchor="ctr"/>
+          <a:lstStyle/>
+          <a:p>
+            <a:pPr indent="0" marL="0">
+              <a:lnSpc>
+                <a:spcPct val="103000"/>
+              </a:lnSpc>
+              <a:buNone/>
+            </a:pPr>
+            <a:r>
+              <a:rPr lang="en-US" sz="1200" dirty="0">
+                <a:solidFill>
+                  <a:srgbClr val="E7F0F8"/>
                 </a:solidFill>
                 <a:latin typeface="Calibri" pitchFamily="34" charset="0"/>
                 <a:ea typeface="Calibri" pitchFamily="34" charset="-122"/>
                 <a:cs typeface="Calibri" pitchFamily="34" charset="-120"/>
               </a:rPr>
-              <a:t>요구정의(REQ-*)·수용기준·체크리스트</a:t>
-            </a:r>
-            <a:endParaRPr lang="en-US" sz="1250" dirty="0"/>
-          </a:p>
-        </p:txBody>
-      </p:sp>
-      <p:sp>
-        <p:nvSpPr>
-          <p:cNvPr id="24" name="Text 22"/>
-          <p:cNvSpPr txBox="1"/>
-          <p:nvPr/>
-        </p:nvSpPr>
-        <p:spPr>
-          <a:xfrm>
-            <a:off x="6492240" y="5367528"/>
-            <a:ext cx="4937760" cy="411480"/>
-          </a:xfrm>
-          <a:prstGeom prst="rect">
-            <a:avLst/>
-          </a:prstGeom>
-          <a:noFill/>
-          <a:ln/>
-        </p:spPr>
-        <p:txBody>
-          <a:bodyPr wrap="square" lIns="0" tIns="0" rIns="0" bIns="0" rtlCol="0" anchor="ctr"/>
-          <a:lstStyle/>
-          <a:p>
-            <a:pPr marL="152400" indent="-152400">
-              <a:buSzPct val="100000"/>
-              <a:buChar char="•"/>
-            </a:pPr>
-            <a:r>
-              <a:rPr lang="en-US" sz="1250" dirty="0">
-                <a:solidFill>
-                  <a:srgbClr val="1B2733"/>
+              <a:t>USE_LIVE_TOOLS=1 (Vivado/시뮬) — EDA 라이선스 보유 사내 에이전트</a:t>
+            </a:r>
+            <a:endParaRPr lang="en-US" sz="1200" dirty="0"/>
+          </a:p>
+        </p:txBody>
+      </p:sp>
+      <p:sp>
+        <p:nvSpPr>
+          <p:cNvPr id="18" name="Shape 16"/>
+          <p:cNvSpPr/>
+          <p:nvPr/>
+        </p:nvSpPr>
+        <p:spPr>
+          <a:xfrm>
+            <a:off x="6446520" y="4169664"/>
+            <a:ext cx="1005840" cy="457200"/>
+          </a:xfrm>
+          <a:prstGeom prst="roundRect">
+            <a:avLst>
+              <a:gd name="adj" fmla="val 12000"/>
+            </a:avLst>
+          </a:prstGeom>
+          <a:solidFill>
+            <a:srgbClr val="1FB6A6"/>
+          </a:solidFill>
+          <a:ln/>
+        </p:spPr>
+      </p:sp>
+      <p:sp>
+        <p:nvSpPr>
+          <p:cNvPr id="19" name="Text 17"/>
+          <p:cNvSpPr txBox="1"/>
+          <p:nvPr/>
+        </p:nvSpPr>
+        <p:spPr>
+          <a:xfrm>
+            <a:off x="6446520" y="4169664"/>
+            <a:ext cx="1005840" cy="457200"/>
+          </a:xfrm>
+          <a:prstGeom prst="rect">
+            <a:avLst/>
+          </a:prstGeom>
+          <a:noFill/>
+          <a:ln/>
+        </p:spPr>
+        <p:txBody>
+          <a:bodyPr wrap="square" lIns="0" tIns="0" rIns="0" bIns="0" rtlCol="0" anchor="ctr"/>
+          <a:lstStyle/>
+          <a:p>
+            <a:pPr algn="ctr" indent="0" marL="0">
+              <a:buNone/>
+            </a:pPr>
+            <a:r>
+              <a:rPr lang="en-US" sz="1300" b="1" dirty="0">
+                <a:solidFill>
+                  <a:srgbClr val="FFFFFF"/>
+                </a:solidFill>
+                <a:latin typeface="Cambria" pitchFamily="34" charset="0"/>
+                <a:ea typeface="Cambria" pitchFamily="34" charset="-122"/>
+                <a:cs typeface="Cambria" pitchFamily="34" charset="-120"/>
+              </a:rPr>
+              <a:t>결과</a:t>
+            </a:r>
+            <a:endParaRPr lang="en-US" sz="1300" dirty="0"/>
+          </a:p>
+        </p:txBody>
+      </p:sp>
+      <p:sp>
+        <p:nvSpPr>
+          <p:cNvPr id="20" name="Text 18"/>
+          <p:cNvSpPr txBox="1"/>
+          <p:nvPr/>
+        </p:nvSpPr>
+        <p:spPr>
+          <a:xfrm>
+            <a:off x="7589520" y="4151376"/>
+            <a:ext cx="3886200" cy="548640"/>
+          </a:xfrm>
+          <a:prstGeom prst="rect">
+            <a:avLst/>
+          </a:prstGeom>
+          <a:noFill/>
+          <a:ln/>
+        </p:spPr>
+        <p:txBody>
+          <a:bodyPr wrap="square" lIns="0" tIns="0" rIns="0" bIns="0" rtlCol="0" anchor="ctr"/>
+          <a:lstStyle/>
+          <a:p>
+            <a:pPr indent="0" marL="0">
+              <a:lnSpc>
+                <a:spcPct val="103000"/>
+              </a:lnSpc>
+              <a:buNone/>
+            </a:pPr>
+            <a:r>
+              <a:rPr lang="en-US" sz="1200" dirty="0">
+                <a:solidFill>
+                  <a:srgbClr val="E7F0F8"/>
                 </a:solidFill>
                 <a:latin typeface="Calibri" pitchFamily="34" charset="0"/>
                 <a:ea typeface="Calibri" pitchFamily="34" charset="-122"/>
                 <a:cs typeface="Calibri" pitchFamily="34" charset="-120"/>
               </a:rPr>
-              <a:t>참조 RTL 스텁 + 스모크 TB</a:t>
-            </a:r>
-            <a:endParaRPr lang="en-US" sz="1250" dirty="0"/>
-          </a:p>
-        </p:txBody>
-      </p:sp>
-      <p:sp>
-        <p:nvSpPr>
-          <p:cNvPr id="25" name="Text 23"/>
-          <p:cNvSpPr txBox="1"/>
-          <p:nvPr/>
-        </p:nvSpPr>
-        <p:spPr>
-          <a:xfrm>
-            <a:off x="6492240" y="5788152"/>
-            <a:ext cx="4937760" cy="411480"/>
-          </a:xfrm>
-          <a:prstGeom prst="rect">
-            <a:avLst/>
-          </a:prstGeom>
-          <a:noFill/>
-          <a:ln/>
-        </p:spPr>
-        <p:txBody>
-          <a:bodyPr wrap="square" lIns="0" tIns="0" rIns="0" bIns="0" rtlCol="0" anchor="ctr"/>
-          <a:lstStyle/>
-          <a:p>
-            <a:pPr marL="152400" indent="-152400">
-              <a:buSzPct val="100000"/>
-              <a:buChar char="•"/>
-            </a:pPr>
-            <a:r>
-              <a:rPr lang="en-US" sz="1250" dirty="0">
-                <a:solidFill>
-                  <a:srgbClr val="1B2733"/>
+              <a:t>Build Status · Code Insights 로 PR에 되돌려 표시</a:t>
+            </a:r>
+            <a:endParaRPr lang="en-US" sz="1200" dirty="0"/>
+          </a:p>
+        </p:txBody>
+      </p:sp>
+      <p:sp>
+        <p:nvSpPr>
+          <p:cNvPr id="21" name="Text 19"/>
+          <p:cNvSpPr txBox="1"/>
+          <p:nvPr/>
+        </p:nvSpPr>
+        <p:spPr>
+          <a:xfrm>
+            <a:off x="6446520" y="5029200"/>
+            <a:ext cx="5029200" cy="411480"/>
+          </a:xfrm>
+          <a:prstGeom prst="rect">
+            <a:avLst/>
+          </a:prstGeom>
+          <a:noFill/>
+          <a:ln/>
+        </p:spPr>
+        <p:txBody>
+          <a:bodyPr wrap="square" lIns="0" tIns="0" rIns="0" bIns="0" rtlCol="0" anchor="ctr"/>
+          <a:lstStyle/>
+          <a:p>
+            <a:pPr indent="0" marL="0">
+              <a:lnSpc>
+                <a:spcPct val="103000"/>
+              </a:lnSpc>
+              <a:buNone/>
+            </a:pPr>
+            <a:r>
+              <a:rPr lang="en-US" sz="1080" i="1" dirty="0">
+                <a:solidFill>
+                  <a:srgbClr val="AEC3D6"/>
                 </a:solidFill>
                 <a:latin typeface="Calibri" pitchFamily="34" charset="0"/>
                 <a:ea typeface="Calibri" pitchFamily="34" charset="-122"/>
                 <a:cs typeface="Calibri" pitchFamily="34" charset="-120"/>
               </a:rPr>
-              <a:t>run-lint/sim: mock + Verilator/xsim live 연동</a:t>
+              <a:t>Bitbucket Pipelines(클라우드 전용)는 미사용 · 하네스는 코멘트/리포트까지, 자동 병합·승인 금지</a:t>
+            </a:r>
+            <a:endParaRPr lang="en-US" sz="1080" dirty="0"/>
+          </a:p>
+        </p:txBody>
+      </p:sp>
+      <p:sp>
+        <p:nvSpPr>
+          <p:cNvPr id="22" name="Text 20"/>
+          <p:cNvSpPr txBox="1"/>
+          <p:nvPr/>
+        </p:nvSpPr>
+        <p:spPr>
+          <a:xfrm>
+            <a:off x="548640" y="5715000"/>
+            <a:ext cx="11064240" cy="411480"/>
+          </a:xfrm>
+          <a:prstGeom prst="rect">
+            <a:avLst/>
+          </a:prstGeom>
+          <a:noFill/>
+          <a:ln/>
+        </p:spPr>
+        <p:txBody>
+          <a:bodyPr wrap="square" lIns="0" tIns="0" rIns="0" bIns="0" rtlCol="0" anchor="ctr"/>
+          <a:lstStyle/>
+          <a:p>
+            <a:pPr indent="0" marL="0">
+              <a:buNone/>
+            </a:pPr>
+            <a:r>
+              <a:rPr lang="en-US" sz="1250" i="1" dirty="0">
+                <a:solidFill>
+                  <a:srgbClr val="5B6B7A"/>
+                </a:solidFill>
+                <a:latin typeface="Calibri" pitchFamily="34" charset="0"/>
+                <a:ea typeface="Calibri" pitchFamily="34" charset="-122"/>
+                <a:cs typeface="Calibri" pitchFamily="34" charset="-120"/>
+              </a:rPr>
+              <a:t>모델 호출도 사내 경계(Bedrock/Vertex over VPC, 또는 사내 게이트웨이) 안에서 수행 → 온프레미스 정책과 일치</a:t>
             </a:r>
             <a:endParaRPr lang="en-US" sz="1250" dirty="0"/>
           </a:p>
@@ -4349,6 +4280,972 @@
 <file path=ppt/slides/slide12.xml><?xml version="1.0" encoding="utf-8"?>
 <p:sld xmlns:a="http://schemas.openxmlformats.org/drawingml/2006/main" xmlns:r="http://schemas.openxmlformats.org/officeDocument/2006/relationships" xmlns:p="http://schemas.openxmlformats.org/presentationml/2006/main">
   <p:cSld name="Slide 12">
+    <p:bg>
+      <p:bgPr>
+        <a:solidFill>
+          <a:srgbClr val="FFFFFF"/>
+        </a:solidFill>
+      </p:bgPr>
+    </p:bg>
+    <p:spTree>
+      <p:nvGrpSpPr>
+        <p:cNvPr id="1" name=""/>
+        <p:cNvGrpSpPr/>
+        <p:nvPr/>
+      </p:nvGrpSpPr>
+      <p:grpSpPr>
+        <a:xfrm>
+          <a:off x="0" y="0"/>
+          <a:ext cx="0" cy="0"/>
+          <a:chOff x="0" y="0"/>
+          <a:chExt cx="0" cy="0"/>
+        </a:xfrm>
+      </p:grpSpPr>
+      <p:sp>
+        <p:nvSpPr>
+          <p:cNvPr id="2" name="Text 0"/>
+          <p:cNvSpPr txBox="1"/>
+          <p:nvPr/>
+        </p:nvSpPr>
+        <p:spPr>
+          <a:xfrm>
+            <a:off x="548640" y="384048"/>
+            <a:ext cx="10972800" cy="274320"/>
+          </a:xfrm>
+          <a:prstGeom prst="rect">
+            <a:avLst/>
+          </a:prstGeom>
+          <a:noFill/>
+          <a:ln/>
+        </p:spPr>
+        <p:txBody>
+          <a:bodyPr wrap="square" lIns="0" tIns="0" rIns="0" bIns="0" rtlCol="0" anchor="ctr"/>
+          <a:lstStyle/>
+          <a:p>
+            <a:pPr indent="0" marL="0">
+              <a:buNone/>
+            </a:pPr>
+            <a:r>
+              <a:rPr lang="en-US" sz="1200" b="1" spc="200" kern="0" dirty="0">
+                <a:solidFill>
+                  <a:srgbClr val="1FB6A6"/>
+                </a:solidFill>
+                <a:latin typeface="Calibri" pitchFamily="34" charset="0"/>
+                <a:ea typeface="Calibri" pitchFamily="34" charset="-122"/>
+                <a:cs typeface="Calibri" pitchFamily="34" charset="-120"/>
+              </a:rPr>
+              <a:t>파일럿 대상 IP</a:t>
+            </a:r>
+            <a:endParaRPr lang="en-US" sz="1200" dirty="0"/>
+          </a:p>
+        </p:txBody>
+      </p:sp>
+      <p:sp>
+        <p:nvSpPr>
+          <p:cNvPr id="3" name="Text 1"/>
+          <p:cNvSpPr txBox="1"/>
+          <p:nvPr/>
+        </p:nvSpPr>
+        <p:spPr>
+          <a:xfrm>
+            <a:off x="548640" y="658368"/>
+            <a:ext cx="11064240" cy="777240"/>
+          </a:xfrm>
+          <a:prstGeom prst="rect">
+            <a:avLst/>
+          </a:prstGeom>
+          <a:noFill/>
+          <a:ln/>
+        </p:spPr>
+        <p:txBody>
+          <a:bodyPr wrap="square" lIns="0" tIns="0" rIns="0" bIns="0" rtlCol="0" anchor="ctr"/>
+          <a:lstStyle/>
+          <a:p>
+            <a:pPr indent="0" marL="0">
+              <a:buNone/>
+            </a:pPr>
+            <a:r>
+              <a:rPr lang="en-US" sz="3200" b="1" dirty="0">
+                <a:solidFill>
+                  <a:srgbClr val="0B2447"/>
+                </a:solidFill>
+                <a:latin typeface="Cambria" pitchFamily="34" charset="0"/>
+                <a:ea typeface="Cambria" pitchFamily="34" charset="-122"/>
+                <a:cs typeface="Cambria" pitchFamily="34" charset="-120"/>
+              </a:rPr>
+              <a:t>AXI4-Lite로 제어되는 IEEE 1500 HBM PMBIST 컨트롤러</a:t>
+            </a:r>
+            <a:endParaRPr lang="en-US" sz="3200" dirty="0"/>
+          </a:p>
+        </p:txBody>
+      </p:sp>
+      <p:sp>
+        <p:nvSpPr>
+          <p:cNvPr id="4" name="Shape 2"/>
+          <p:cNvSpPr/>
+          <p:nvPr/>
+        </p:nvSpPr>
+        <p:spPr>
+          <a:xfrm>
+            <a:off x="731520" y="1965960"/>
+            <a:ext cx="3108960" cy="1554480"/>
+          </a:xfrm>
+          <a:prstGeom prst="roundRect">
+            <a:avLst>
+              <a:gd name="adj" fmla="val 5882"/>
+            </a:avLst>
+          </a:prstGeom>
+          <a:solidFill>
+            <a:srgbClr val="153B66"/>
+          </a:solidFill>
+          <a:ln/>
+        </p:spPr>
+      </p:sp>
+      <p:sp>
+        <p:nvSpPr>
+          <p:cNvPr id="5" name="Text 3"/>
+          <p:cNvSpPr txBox="1"/>
+          <p:nvPr/>
+        </p:nvSpPr>
+        <p:spPr>
+          <a:xfrm>
+            <a:off x="868680" y="2221992"/>
+            <a:ext cx="2834640" cy="640080"/>
+          </a:xfrm>
+          <a:prstGeom prst="rect">
+            <a:avLst/>
+          </a:prstGeom>
+          <a:noFill/>
+          <a:ln/>
+        </p:spPr>
+        <p:txBody>
+          <a:bodyPr wrap="square" lIns="0" tIns="0" rIns="0" bIns="0" rtlCol="0" anchor="ctr"/>
+          <a:lstStyle/>
+          <a:p>
+            <a:pPr algn="ctr" indent="0" marL="0">
+              <a:buNone/>
+            </a:pPr>
+            <a:r>
+              <a:rPr lang="en-US" sz="1800" b="1" dirty="0">
+                <a:solidFill>
+                  <a:srgbClr val="FFFFFF"/>
+                </a:solidFill>
+                <a:latin typeface="Cambria" pitchFamily="34" charset="0"/>
+                <a:ea typeface="Cambria" pitchFamily="34" charset="-122"/>
+                <a:cs typeface="Cambria" pitchFamily="34" charset="-120"/>
+              </a:rPr>
+              <a:t>호스트</a:t>
+            </a:r>
+            <a:endParaRPr lang="en-US" sz="1800" dirty="0"/>
+          </a:p>
+        </p:txBody>
+      </p:sp>
+      <p:sp>
+        <p:nvSpPr>
+          <p:cNvPr id="6" name="Text 4"/>
+          <p:cNvSpPr txBox="1"/>
+          <p:nvPr/>
+        </p:nvSpPr>
+        <p:spPr>
+          <a:xfrm>
+            <a:off x="868680" y="2834640"/>
+            <a:ext cx="2834640" cy="594360"/>
+          </a:xfrm>
+          <a:prstGeom prst="rect">
+            <a:avLst/>
+          </a:prstGeom>
+          <a:noFill/>
+          <a:ln/>
+        </p:spPr>
+        <p:txBody>
+          <a:bodyPr wrap="square" lIns="0" tIns="0" rIns="0" bIns="0" rtlCol="0" anchor="ctr"/>
+          <a:lstStyle/>
+          <a:p>
+            <a:pPr algn="ctr" indent="0" marL="0">
+              <a:buNone/>
+            </a:pPr>
+            <a:r>
+              <a:rPr lang="en-US" sz="1250" dirty="0">
+                <a:solidFill>
+                  <a:srgbClr val="EAF3FA"/>
+                </a:solidFill>
+                <a:latin typeface="Calibri" pitchFamily="34" charset="0"/>
+                <a:ea typeface="Calibri" pitchFamily="34" charset="-122"/>
+                <a:cs typeface="Calibri" pitchFamily="34" charset="-120"/>
+              </a:rPr>
+              <a:t>AXI4-Lite</a:t>
+            </a:r>
+            <a:endParaRPr lang="en-US" sz="1250" dirty="0"/>
+          </a:p>
+          <a:p>
+            <a:pPr algn="ctr" indent="0" marL="0">
+              <a:buNone/>
+            </a:pPr>
+            <a:r>
+              <a:rPr lang="en-US" sz="1250" dirty="0">
+                <a:solidFill>
+                  <a:srgbClr val="EAF3FA"/>
+                </a:solidFill>
+                <a:latin typeface="Calibri" pitchFamily="34" charset="0"/>
+                <a:ea typeface="Calibri" pitchFamily="34" charset="-122"/>
+                <a:cs typeface="Calibri" pitchFamily="34" charset="-120"/>
+              </a:rPr>
+              <a:t>CSR 제어</a:t>
+            </a:r>
+            <a:endParaRPr lang="en-US" sz="1250" dirty="0"/>
+          </a:p>
+        </p:txBody>
+      </p:sp>
+      <p:sp>
+        <p:nvSpPr>
+          <p:cNvPr id="7" name="Text 5"/>
+          <p:cNvSpPr txBox="1"/>
+          <p:nvPr/>
+        </p:nvSpPr>
+        <p:spPr>
+          <a:xfrm>
+            <a:off x="3886200" y="2423160"/>
+            <a:ext cx="731520" cy="640080"/>
+          </a:xfrm>
+          <a:prstGeom prst="rect">
+            <a:avLst/>
+          </a:prstGeom>
+          <a:noFill/>
+          <a:ln/>
+        </p:spPr>
+        <p:txBody>
+          <a:bodyPr wrap="square" lIns="0" tIns="0" rIns="0" bIns="0" rtlCol="0" anchor="ctr"/>
+          <a:lstStyle/>
+          <a:p>
+            <a:pPr algn="ctr" indent="0" marL="0">
+              <a:buNone/>
+            </a:pPr>
+            <a:r>
+              <a:rPr lang="en-US" sz="2800" b="1" dirty="0">
+                <a:solidFill>
+                  <a:srgbClr val="5B6B7A"/>
+                </a:solidFill>
+              </a:rPr>
+              <a:t>→</a:t>
+            </a:r>
+            <a:endParaRPr lang="en-US" sz="2800" dirty="0"/>
+          </a:p>
+        </p:txBody>
+      </p:sp>
+      <p:sp>
+        <p:nvSpPr>
+          <p:cNvPr id="8" name="Shape 6"/>
+          <p:cNvSpPr/>
+          <p:nvPr/>
+        </p:nvSpPr>
+        <p:spPr>
+          <a:xfrm>
+            <a:off x="4663440" y="1965960"/>
+            <a:ext cx="3108960" cy="1554480"/>
+          </a:xfrm>
+          <a:prstGeom prst="roundRect">
+            <a:avLst>
+              <a:gd name="adj" fmla="val 5882"/>
+            </a:avLst>
+          </a:prstGeom>
+          <a:solidFill>
+            <a:srgbClr val="1FB6A6"/>
+          </a:solidFill>
+          <a:ln/>
+        </p:spPr>
+      </p:sp>
+      <p:sp>
+        <p:nvSpPr>
+          <p:cNvPr id="9" name="Text 7"/>
+          <p:cNvSpPr txBox="1"/>
+          <p:nvPr/>
+        </p:nvSpPr>
+        <p:spPr>
+          <a:xfrm>
+            <a:off x="4800600" y="2221992"/>
+            <a:ext cx="2834640" cy="640080"/>
+          </a:xfrm>
+          <a:prstGeom prst="rect">
+            <a:avLst/>
+          </a:prstGeom>
+          <a:noFill/>
+          <a:ln/>
+        </p:spPr>
+        <p:txBody>
+          <a:bodyPr wrap="square" lIns="0" tIns="0" rIns="0" bIns="0" rtlCol="0" anchor="ctr"/>
+          <a:lstStyle/>
+          <a:p>
+            <a:pPr algn="ctr" indent="0" marL="0">
+              <a:buNone/>
+            </a:pPr>
+            <a:r>
+              <a:rPr lang="en-US" sz="1800" b="1" dirty="0">
+                <a:solidFill>
+                  <a:srgbClr val="FFFFFF"/>
+                </a:solidFill>
+                <a:latin typeface="Cambria" pitchFamily="34" charset="0"/>
+                <a:ea typeface="Cambria" pitchFamily="34" charset="-122"/>
+                <a:cs typeface="Cambria" pitchFamily="34" charset="-120"/>
+              </a:rPr>
+              <a:t>IEEE 1500</a:t>
+            </a:r>
+            <a:endParaRPr lang="en-US" sz="1800" dirty="0"/>
+          </a:p>
+          <a:p>
+            <a:pPr algn="ctr" indent="0" marL="0">
+              <a:buNone/>
+            </a:pPr>
+            <a:r>
+              <a:rPr lang="en-US" sz="1800" b="1" dirty="0">
+                <a:solidFill>
+                  <a:srgbClr val="FFFFFF"/>
+                </a:solidFill>
+                <a:latin typeface="Cambria" pitchFamily="34" charset="0"/>
+                <a:ea typeface="Cambria" pitchFamily="34" charset="-122"/>
+                <a:cs typeface="Cambria" pitchFamily="34" charset="-120"/>
+              </a:rPr>
+              <a:t>컨트롤러</a:t>
+            </a:r>
+            <a:endParaRPr lang="en-US" sz="1800" dirty="0"/>
+          </a:p>
+        </p:txBody>
+      </p:sp>
+      <p:sp>
+        <p:nvSpPr>
+          <p:cNvPr id="10" name="Text 8"/>
+          <p:cNvSpPr txBox="1"/>
+          <p:nvPr/>
+        </p:nvSpPr>
+        <p:spPr>
+          <a:xfrm>
+            <a:off x="4800600" y="2834640"/>
+            <a:ext cx="2834640" cy="594360"/>
+          </a:xfrm>
+          <a:prstGeom prst="rect">
+            <a:avLst/>
+          </a:prstGeom>
+          <a:noFill/>
+          <a:ln/>
+        </p:spPr>
+        <p:txBody>
+          <a:bodyPr wrap="square" lIns="0" tIns="0" rIns="0" bIns="0" rtlCol="0" anchor="ctr"/>
+          <a:lstStyle/>
+          <a:p>
+            <a:pPr algn="ctr" indent="0" marL="0">
+              <a:buNone/>
+            </a:pPr>
+            <a:r>
+              <a:rPr lang="en-US" sz="1250" dirty="0">
+                <a:solidFill>
+                  <a:srgbClr val="EAF3FA"/>
+                </a:solidFill>
+                <a:latin typeface="Calibri" pitchFamily="34" charset="0"/>
+                <a:ea typeface="Calibri" pitchFamily="34" charset="-122"/>
+                <a:cs typeface="Calibri" pitchFamily="34" charset="-120"/>
+              </a:rPr>
+              <a:t>WSC · WSI/WSO</a:t>
+            </a:r>
+            <a:endParaRPr lang="en-US" sz="1250" dirty="0"/>
+          </a:p>
+          <a:p>
+            <a:pPr algn="ctr" indent="0" marL="0">
+              <a:buNone/>
+            </a:pPr>
+            <a:r>
+              <a:rPr lang="en-US" sz="1250" dirty="0">
+                <a:solidFill>
+                  <a:srgbClr val="EAF3FA"/>
+                </a:solidFill>
+                <a:latin typeface="Calibri" pitchFamily="34" charset="0"/>
+                <a:ea typeface="Calibri" pitchFamily="34" charset="-122"/>
+                <a:cs typeface="Calibri" pitchFamily="34" charset="-120"/>
+              </a:rPr>
+              <a:t>시퀀스 FSM</a:t>
+            </a:r>
+            <a:endParaRPr lang="en-US" sz="1250" dirty="0"/>
+          </a:p>
+        </p:txBody>
+      </p:sp>
+      <p:sp>
+        <p:nvSpPr>
+          <p:cNvPr id="11" name="Text 9"/>
+          <p:cNvSpPr txBox="1"/>
+          <p:nvPr/>
+        </p:nvSpPr>
+        <p:spPr>
+          <a:xfrm>
+            <a:off x="7818120" y="2423160"/>
+            <a:ext cx="731520" cy="640080"/>
+          </a:xfrm>
+          <a:prstGeom prst="rect">
+            <a:avLst/>
+          </a:prstGeom>
+          <a:noFill/>
+          <a:ln/>
+        </p:spPr>
+        <p:txBody>
+          <a:bodyPr wrap="square" lIns="0" tIns="0" rIns="0" bIns="0" rtlCol="0" anchor="ctr"/>
+          <a:lstStyle/>
+          <a:p>
+            <a:pPr algn="ctr" indent="0" marL="0">
+              <a:buNone/>
+            </a:pPr>
+            <a:r>
+              <a:rPr lang="en-US" sz="2800" b="1" dirty="0">
+                <a:solidFill>
+                  <a:srgbClr val="5B6B7A"/>
+                </a:solidFill>
+              </a:rPr>
+              <a:t>→</a:t>
+            </a:r>
+            <a:endParaRPr lang="en-US" sz="2800" dirty="0"/>
+          </a:p>
+        </p:txBody>
+      </p:sp>
+      <p:sp>
+        <p:nvSpPr>
+          <p:cNvPr id="12" name="Shape 10"/>
+          <p:cNvSpPr/>
+          <p:nvPr/>
+        </p:nvSpPr>
+        <p:spPr>
+          <a:xfrm>
+            <a:off x="8595360" y="1965960"/>
+            <a:ext cx="3108960" cy="1554480"/>
+          </a:xfrm>
+          <a:prstGeom prst="roundRect">
+            <a:avLst>
+              <a:gd name="adj" fmla="val 5882"/>
+            </a:avLst>
+          </a:prstGeom>
+          <a:solidFill>
+            <a:srgbClr val="F2A900"/>
+          </a:solidFill>
+          <a:ln/>
+        </p:spPr>
+      </p:sp>
+      <p:sp>
+        <p:nvSpPr>
+          <p:cNvPr id="13" name="Text 11"/>
+          <p:cNvSpPr txBox="1"/>
+          <p:nvPr/>
+        </p:nvSpPr>
+        <p:spPr>
+          <a:xfrm>
+            <a:off x="8732520" y="2221992"/>
+            <a:ext cx="2834640" cy="640080"/>
+          </a:xfrm>
+          <a:prstGeom prst="rect">
+            <a:avLst/>
+          </a:prstGeom>
+          <a:noFill/>
+          <a:ln/>
+        </p:spPr>
+        <p:txBody>
+          <a:bodyPr wrap="square" lIns="0" tIns="0" rIns="0" bIns="0" rtlCol="0" anchor="ctr"/>
+          <a:lstStyle/>
+          <a:p>
+            <a:pPr algn="ctr" indent="0" marL="0">
+              <a:buNone/>
+            </a:pPr>
+            <a:r>
+              <a:rPr lang="en-US" sz="1800" b="1" dirty="0">
+                <a:solidFill>
+                  <a:srgbClr val="FFFFFF"/>
+                </a:solidFill>
+                <a:latin typeface="Cambria" pitchFamily="34" charset="0"/>
+                <a:ea typeface="Cambria" pitchFamily="34" charset="-122"/>
+                <a:cs typeface="Cambria" pitchFamily="34" charset="-120"/>
+              </a:rPr>
+              <a:t>HBM PMBIST</a:t>
+            </a:r>
+            <a:endParaRPr lang="en-US" sz="1800" dirty="0"/>
+          </a:p>
+        </p:txBody>
+      </p:sp>
+      <p:sp>
+        <p:nvSpPr>
+          <p:cNvPr id="14" name="Text 12"/>
+          <p:cNvSpPr txBox="1"/>
+          <p:nvPr/>
+        </p:nvSpPr>
+        <p:spPr>
+          <a:xfrm>
+            <a:off x="8732520" y="2834640"/>
+            <a:ext cx="2834640" cy="594360"/>
+          </a:xfrm>
+          <a:prstGeom prst="rect">
+            <a:avLst/>
+          </a:prstGeom>
+          <a:noFill/>
+          <a:ln/>
+        </p:spPr>
+        <p:txBody>
+          <a:bodyPr wrap="square" lIns="0" tIns="0" rIns="0" bIns="0" rtlCol="0" anchor="ctr"/>
+          <a:lstStyle/>
+          <a:p>
+            <a:pPr algn="ctr" indent="0" marL="0">
+              <a:buNone/>
+            </a:pPr>
+            <a:r>
+              <a:rPr lang="en-US" sz="1250" dirty="0">
+                <a:solidFill>
+                  <a:srgbClr val="EAF3FA"/>
+                </a:solidFill>
+                <a:latin typeface="Calibri" pitchFamily="34" charset="0"/>
+                <a:ea typeface="Calibri" pitchFamily="34" charset="-122"/>
+                <a:cs typeface="Calibri" pitchFamily="34" charset="-120"/>
+              </a:rPr>
+              <a:t>채널별 BIST</a:t>
+            </a:r>
+            <a:endParaRPr lang="en-US" sz="1250" dirty="0"/>
+          </a:p>
+          <a:p>
+            <a:pPr algn="ctr" indent="0" marL="0">
+              <a:buNone/>
+            </a:pPr>
+            <a:r>
+              <a:rPr lang="en-US" sz="1250" dirty="0">
+                <a:solidFill>
+                  <a:srgbClr val="EAF3FA"/>
+                </a:solidFill>
+                <a:latin typeface="Calibri" pitchFamily="34" charset="0"/>
+                <a:ea typeface="Calibri" pitchFamily="34" charset="-122"/>
+                <a:cs typeface="Calibri" pitchFamily="34" charset="-120"/>
+              </a:rPr>
+              <a:t>결과 수집</a:t>
+            </a:r>
+            <a:endParaRPr lang="en-US" sz="1250" dirty="0"/>
+          </a:p>
+        </p:txBody>
+      </p:sp>
+      <p:sp>
+        <p:nvSpPr>
+          <p:cNvPr id="15" name="Shape 13"/>
+          <p:cNvSpPr/>
+          <p:nvPr/>
+        </p:nvSpPr>
+        <p:spPr>
+          <a:xfrm>
+            <a:off x="548640" y="3886200"/>
+            <a:ext cx="5349240" cy="2377440"/>
+          </a:xfrm>
+          <a:prstGeom prst="roundRect">
+            <a:avLst>
+              <a:gd name="adj" fmla="val 3077"/>
+            </a:avLst>
+          </a:prstGeom>
+          <a:solidFill>
+            <a:srgbClr val="F1F5F9"/>
+          </a:solidFill>
+          <a:ln/>
+          <a:effectLst>
+            <a:outerShdw sx="100000" sy="100000" kx="0" ky="0" algn="bl" rotWithShape="0" blurRad="76200" dist="25400" dir="5400000">
+              <a:srgbClr val="9AA7B4">
+                <a:alpha val="35000"/>
+              </a:srgbClr>
+            </a:outerShdw>
+          </a:effectLst>
+        </p:spPr>
+      </p:sp>
+      <p:sp>
+        <p:nvSpPr>
+          <p:cNvPr id="16" name="Text 14"/>
+          <p:cNvSpPr txBox="1"/>
+          <p:nvPr/>
+        </p:nvSpPr>
+        <p:spPr>
+          <a:xfrm>
+            <a:off x="822960" y="4069080"/>
+            <a:ext cx="4754880" cy="365760"/>
+          </a:xfrm>
+          <a:prstGeom prst="rect">
+            <a:avLst/>
+          </a:prstGeom>
+          <a:noFill/>
+          <a:ln/>
+        </p:spPr>
+        <p:txBody>
+          <a:bodyPr wrap="square" lIns="0" tIns="0" rIns="0" bIns="0" rtlCol="0" anchor="ctr"/>
+          <a:lstStyle/>
+          <a:p>
+            <a:pPr indent="0" marL="0">
+              <a:buNone/>
+            </a:pPr>
+            <a:r>
+              <a:rPr lang="en-US" sz="1600" b="1" dirty="0">
+                <a:solidFill>
+                  <a:srgbClr val="0B2447"/>
+                </a:solidFill>
+                <a:latin typeface="Cambria" pitchFamily="34" charset="0"/>
+                <a:ea typeface="Cambria" pitchFamily="34" charset="-122"/>
+                <a:cs typeface="Cambria" pitchFamily="34" charset="-120"/>
+              </a:rPr>
+              <a:t>핵심 리스크</a:t>
+            </a:r>
+            <a:endParaRPr lang="en-US" sz="1600" dirty="0"/>
+          </a:p>
+        </p:txBody>
+      </p:sp>
+      <p:sp>
+        <p:nvSpPr>
+          <p:cNvPr id="17" name="Text 15"/>
+          <p:cNvSpPr txBox="1"/>
+          <p:nvPr/>
+        </p:nvSpPr>
+        <p:spPr>
+          <a:xfrm>
+            <a:off x="868680" y="4526280"/>
+            <a:ext cx="4846320" cy="457200"/>
+          </a:xfrm>
+          <a:prstGeom prst="rect">
+            <a:avLst/>
+          </a:prstGeom>
+          <a:noFill/>
+          <a:ln/>
+        </p:spPr>
+        <p:txBody>
+          <a:bodyPr wrap="square" lIns="0" tIns="0" rIns="0" bIns="0" rtlCol="0" anchor="ctr"/>
+          <a:lstStyle/>
+          <a:p>
+            <a:pPr marL="152400" indent="-152400">
+              <a:buSzPct val="100000"/>
+              <a:buChar char="•"/>
+            </a:pPr>
+            <a:r>
+              <a:rPr lang="en-US" sz="1300" dirty="0">
+                <a:solidFill>
+                  <a:srgbClr val="1B2733"/>
+                </a:solidFill>
+                <a:latin typeface="Calibri" pitchFamily="34" charset="0"/>
+                <a:ea typeface="Calibri" pitchFamily="34" charset="-122"/>
+                <a:cs typeface="Calibri" pitchFamily="34" charset="-120"/>
+              </a:rPr>
+              <a:t>aclk(AXI) ↔ WRCK(테스트) 클록 도메인 크로싱</a:t>
+            </a:r>
+            <a:endParaRPr lang="en-US" sz="1300" dirty="0"/>
+          </a:p>
+        </p:txBody>
+      </p:sp>
+      <p:sp>
+        <p:nvSpPr>
+          <p:cNvPr id="18" name="Text 16"/>
+          <p:cNvSpPr txBox="1"/>
+          <p:nvPr/>
+        </p:nvSpPr>
+        <p:spPr>
+          <a:xfrm>
+            <a:off x="868680" y="5029200"/>
+            <a:ext cx="4846320" cy="457200"/>
+          </a:xfrm>
+          <a:prstGeom prst="rect">
+            <a:avLst/>
+          </a:prstGeom>
+          <a:noFill/>
+          <a:ln/>
+        </p:spPr>
+        <p:txBody>
+          <a:bodyPr wrap="square" lIns="0" tIns="0" rIns="0" bIns="0" rtlCol="0" anchor="ctr"/>
+          <a:lstStyle/>
+          <a:p>
+            <a:pPr marL="152400" indent="-152400">
+              <a:buSzPct val="100000"/>
+              <a:buChar char="•"/>
+            </a:pPr>
+            <a:r>
+              <a:rPr lang="en-US" sz="1300" dirty="0">
+                <a:solidFill>
+                  <a:srgbClr val="1B2733"/>
+                </a:solidFill>
+                <a:latin typeface="Calibri" pitchFamily="34" charset="0"/>
+                <a:ea typeface="Calibri" pitchFamily="34" charset="-122"/>
+                <a:cs typeface="Calibri" pitchFamily="34" charset="-120"/>
+              </a:rPr>
+              <a:t>리셋 도메인 · 시퀀스 FSM 정합성</a:t>
+            </a:r>
+            <a:endParaRPr lang="en-US" sz="1300" dirty="0"/>
+          </a:p>
+        </p:txBody>
+      </p:sp>
+      <p:sp>
+        <p:nvSpPr>
+          <p:cNvPr id="19" name="Text 17"/>
+          <p:cNvSpPr txBox="1"/>
+          <p:nvPr/>
+        </p:nvSpPr>
+        <p:spPr>
+          <a:xfrm>
+            <a:off x="868680" y="5532120"/>
+            <a:ext cx="4846320" cy="457200"/>
+          </a:xfrm>
+          <a:prstGeom prst="rect">
+            <a:avLst/>
+          </a:prstGeom>
+          <a:noFill/>
+          <a:ln/>
+        </p:spPr>
+        <p:txBody>
+          <a:bodyPr wrap="square" lIns="0" tIns="0" rIns="0" bIns="0" rtlCol="0" anchor="ctr"/>
+          <a:lstStyle/>
+          <a:p>
+            <a:pPr marL="152400" indent="-152400">
+              <a:buSzPct val="100000"/>
+              <a:buChar char="•"/>
+            </a:pPr>
+            <a:r>
+              <a:rPr lang="en-US" sz="1300" dirty="0">
+                <a:solidFill>
+                  <a:srgbClr val="1B2733"/>
+                </a:solidFill>
+                <a:latin typeface="Calibri" pitchFamily="34" charset="0"/>
+                <a:ea typeface="Calibri" pitchFamily="34" charset="-122"/>
+                <a:cs typeface="Calibri" pitchFamily="34" charset="-120"/>
+              </a:rPr>
+              <a:t>AXI4-Lite 프로토콜 준수 · SLVERR 정책</a:t>
+            </a:r>
+            <a:endParaRPr lang="en-US" sz="1300" dirty="0"/>
+          </a:p>
+        </p:txBody>
+      </p:sp>
+      <p:sp>
+        <p:nvSpPr>
+          <p:cNvPr id="20" name="Shape 18"/>
+          <p:cNvSpPr/>
+          <p:nvPr/>
+        </p:nvSpPr>
+        <p:spPr>
+          <a:xfrm>
+            <a:off x="6172200" y="3886200"/>
+            <a:ext cx="5440680" cy="2377440"/>
+          </a:xfrm>
+          <a:prstGeom prst="roundRect">
+            <a:avLst>
+              <a:gd name="adj" fmla="val 3077"/>
+            </a:avLst>
+          </a:prstGeom>
+          <a:solidFill>
+            <a:srgbClr val="F1F5F9"/>
+          </a:solidFill>
+          <a:ln/>
+          <a:effectLst>
+            <a:outerShdw sx="100000" sy="100000" kx="0" ky="0" algn="bl" rotWithShape="0" blurRad="76200" dist="25400" dir="5400000">
+              <a:srgbClr val="9AA7B4">
+                <a:alpha val="35000"/>
+              </a:srgbClr>
+            </a:outerShdw>
+          </a:effectLst>
+        </p:spPr>
+      </p:sp>
+      <p:sp>
+        <p:nvSpPr>
+          <p:cNvPr id="21" name="Text 19"/>
+          <p:cNvSpPr txBox="1"/>
+          <p:nvPr/>
+        </p:nvSpPr>
+        <p:spPr>
+          <a:xfrm>
+            <a:off x="6446520" y="4069080"/>
+            <a:ext cx="4937760" cy="365760"/>
+          </a:xfrm>
+          <a:prstGeom prst="rect">
+            <a:avLst/>
+          </a:prstGeom>
+          <a:noFill/>
+          <a:ln/>
+        </p:spPr>
+        <p:txBody>
+          <a:bodyPr wrap="square" lIns="0" tIns="0" rIns="0" bIns="0" rtlCol="0" anchor="ctr"/>
+          <a:lstStyle/>
+          <a:p>
+            <a:pPr indent="0" marL="0">
+              <a:buNone/>
+            </a:pPr>
+            <a:r>
+              <a:rPr lang="en-US" sz="1600" b="1" dirty="0">
+                <a:solidFill>
+                  <a:srgbClr val="0B2447"/>
+                </a:solidFill>
+                <a:latin typeface="Cambria" pitchFamily="34" charset="0"/>
+                <a:ea typeface="Cambria" pitchFamily="34" charset="-122"/>
+                <a:cs typeface="Cambria" pitchFamily="34" charset="-120"/>
+              </a:rPr>
+              <a:t>제공한 하네스 골격 (doc/ip/)</a:t>
+            </a:r>
+            <a:endParaRPr lang="en-US" sz="1600" dirty="0"/>
+          </a:p>
+        </p:txBody>
+      </p:sp>
+      <p:sp>
+        <p:nvSpPr>
+          <p:cNvPr id="22" name="Text 20"/>
+          <p:cNvSpPr txBox="1"/>
+          <p:nvPr/>
+        </p:nvSpPr>
+        <p:spPr>
+          <a:xfrm>
+            <a:off x="6492240" y="4526280"/>
+            <a:ext cx="4937760" cy="411480"/>
+          </a:xfrm>
+          <a:prstGeom prst="rect">
+            <a:avLst/>
+          </a:prstGeom>
+          <a:noFill/>
+          <a:ln/>
+        </p:spPr>
+        <p:txBody>
+          <a:bodyPr wrap="square" lIns="0" tIns="0" rIns="0" bIns="0" rtlCol="0" anchor="ctr"/>
+          <a:lstStyle/>
+          <a:p>
+            <a:pPr marL="152400" indent="-152400">
+              <a:buSzPct val="100000"/>
+              <a:buChar char="•"/>
+            </a:pPr>
+            <a:r>
+              <a:rPr lang="en-US" sz="1250" dirty="0">
+                <a:solidFill>
+                  <a:srgbClr val="1B2733"/>
+                </a:solidFill>
+                <a:latin typeface="Calibri" pitchFamily="34" charset="0"/>
+                <a:ea typeface="Calibri" pitchFamily="34" charset="-122"/>
+                <a:cs typeface="Calibri" pitchFamily="34" charset="-120"/>
+              </a:rPr>
+              <a:t>에이전트 8종 + 스킬 5종 + device-refs 라우터</a:t>
+            </a:r>
+            <a:endParaRPr lang="en-US" sz="1250" dirty="0"/>
+          </a:p>
+        </p:txBody>
+      </p:sp>
+      <p:sp>
+        <p:nvSpPr>
+          <p:cNvPr id="23" name="Text 21"/>
+          <p:cNvSpPr txBox="1"/>
+          <p:nvPr/>
+        </p:nvSpPr>
+        <p:spPr>
+          <a:xfrm>
+            <a:off x="6492240" y="4946904"/>
+            <a:ext cx="4937760" cy="411480"/>
+          </a:xfrm>
+          <a:prstGeom prst="rect">
+            <a:avLst/>
+          </a:prstGeom>
+          <a:noFill/>
+          <a:ln/>
+        </p:spPr>
+        <p:txBody>
+          <a:bodyPr wrap="square" lIns="0" tIns="0" rIns="0" bIns="0" rtlCol="0" anchor="ctr"/>
+          <a:lstStyle/>
+          <a:p>
+            <a:pPr marL="152400" indent="-152400">
+              <a:buSzPct val="100000"/>
+              <a:buChar char="•"/>
+            </a:pPr>
+            <a:r>
+              <a:rPr lang="en-US" sz="1250" dirty="0">
+                <a:solidFill>
+                  <a:srgbClr val="1B2733"/>
+                </a:solidFill>
+                <a:latin typeface="Calibri" pitchFamily="34" charset="0"/>
+                <a:ea typeface="Calibri" pitchFamily="34" charset="-122"/>
+                <a:cs typeface="Calibri" pitchFamily="34" charset="-120"/>
+              </a:rPr>
+              <a:t>요구정의(REQ-*)·수용기준·체크리스트</a:t>
+            </a:r>
+            <a:endParaRPr lang="en-US" sz="1250" dirty="0"/>
+          </a:p>
+        </p:txBody>
+      </p:sp>
+      <p:sp>
+        <p:nvSpPr>
+          <p:cNvPr id="24" name="Text 22"/>
+          <p:cNvSpPr txBox="1"/>
+          <p:nvPr/>
+        </p:nvSpPr>
+        <p:spPr>
+          <a:xfrm>
+            <a:off x="6492240" y="5367528"/>
+            <a:ext cx="4937760" cy="411480"/>
+          </a:xfrm>
+          <a:prstGeom prst="rect">
+            <a:avLst/>
+          </a:prstGeom>
+          <a:noFill/>
+          <a:ln/>
+        </p:spPr>
+        <p:txBody>
+          <a:bodyPr wrap="square" lIns="0" tIns="0" rIns="0" bIns="0" rtlCol="0" anchor="ctr"/>
+          <a:lstStyle/>
+          <a:p>
+            <a:pPr marL="152400" indent="-152400">
+              <a:buSzPct val="100000"/>
+              <a:buChar char="•"/>
+            </a:pPr>
+            <a:r>
+              <a:rPr lang="en-US" sz="1250" dirty="0">
+                <a:solidFill>
+                  <a:srgbClr val="1B2733"/>
+                </a:solidFill>
+                <a:latin typeface="Calibri" pitchFamily="34" charset="0"/>
+                <a:ea typeface="Calibri" pitchFamily="34" charset="-122"/>
+                <a:cs typeface="Calibri" pitchFamily="34" charset="-120"/>
+              </a:rPr>
+              <a:t>참조 RTL 스텁 + 스모크 TB</a:t>
+            </a:r>
+            <a:endParaRPr lang="en-US" sz="1250" dirty="0"/>
+          </a:p>
+        </p:txBody>
+      </p:sp>
+      <p:sp>
+        <p:nvSpPr>
+          <p:cNvPr id="25" name="Text 23"/>
+          <p:cNvSpPr txBox="1"/>
+          <p:nvPr/>
+        </p:nvSpPr>
+        <p:spPr>
+          <a:xfrm>
+            <a:off x="6492240" y="5788152"/>
+            <a:ext cx="4937760" cy="411480"/>
+          </a:xfrm>
+          <a:prstGeom prst="rect">
+            <a:avLst/>
+          </a:prstGeom>
+          <a:noFill/>
+          <a:ln/>
+        </p:spPr>
+        <p:txBody>
+          <a:bodyPr wrap="square" lIns="0" tIns="0" rIns="0" bIns="0" rtlCol="0" anchor="ctr"/>
+          <a:lstStyle/>
+          <a:p>
+            <a:pPr marL="152400" indent="-152400">
+              <a:buSzPct val="100000"/>
+              <a:buChar char="•"/>
+            </a:pPr>
+            <a:r>
+              <a:rPr lang="en-US" sz="1250" dirty="0">
+                <a:solidFill>
+                  <a:srgbClr val="1B2733"/>
+                </a:solidFill>
+                <a:latin typeface="Calibri" pitchFamily="34" charset="0"/>
+                <a:ea typeface="Calibri" pitchFamily="34" charset="-122"/>
+                <a:cs typeface="Calibri" pitchFamily="34" charset="-120"/>
+              </a:rPr>
+              <a:t>run-lint/sim: mock + Verilator/xsim live 연동</a:t>
+            </a:r>
+            <a:endParaRPr lang="en-US" sz="1250" dirty="0"/>
+          </a:p>
+        </p:txBody>
+      </p:sp>
+    </p:spTree>
+  </p:cSld>
+  <p:clrMapOvr>
+    <a:masterClrMapping/>
+  </p:clrMapOvr>
+</p:sld>
+</file>
+
+<file path=ppt/slides/slide13.xml><?xml version="1.0" encoding="utf-8"?>
+<p:sld xmlns:a="http://schemas.openxmlformats.org/drawingml/2006/main" xmlns:r="http://schemas.openxmlformats.org/officeDocument/2006/relationships" xmlns:p="http://schemas.openxmlformats.org/presentationml/2006/main">
+  <p:cSld name="Slide 13">
     <p:bg>
       <p:bgPr>
         <a:solidFill>
